--- a/PLAN/Gestion_Carteras_IA.pptx
+++ b/PLAN/Gestion_Carteras_IA.pptx
@@ -14,9 +14,10 @@
     <p:sldId id="262" r:id="rId8"/>
     <p:sldId id="263" r:id="rId9"/>
     <p:sldId id="264" r:id="rId10"/>
+    <p:sldId id="265" r:id="rId11"/>
   </p:sldIdLst>
   <p:notesMasterIdLst>
-    <p:notesMasterId r:id="rId11"/>
+    <p:notesMasterId r:id="rId12"/>
   </p:notesMasterIdLst>
   <p:sldSz cx="12192000" cy="6858000"/>
   <p:notesSz cx="6858000" cy="12192000"/>
@@ -552,6 +553,94 @@
 </p:notes>
 </file>
 
+<file path=ppt/notesSlides/notesSlide10.xml><?xml version="1.0" encoding="utf-8"?>
+<p:notes xmlns:a="http://schemas.openxmlformats.org/drawingml/2006/main" xmlns:r="http://schemas.openxmlformats.org/officeDocument/2006/relationships" xmlns:p="http://schemas.openxmlformats.org/presentationml/2006/main">
+  <p:cSld>
+    <p:spTree>
+      <p:nvGrpSpPr>
+        <p:cNvPr id="1" name=""/>
+        <p:cNvGrpSpPr/>
+        <p:nvPr/>
+      </p:nvGrpSpPr>
+      <p:grpSpPr>
+        <a:xfrm>
+          <a:off x="0" y="0"/>
+          <a:ext cx="0" cy="0"/>
+          <a:chOff x="0" y="0"/>
+          <a:chExt cx="0" cy="0"/>
+        </a:xfrm>
+      </p:grpSpPr>
+      <p:sp>
+        <p:nvSpPr>
+          <p:cNvPr id="2" name="Slide Image Placeholder 1"/>
+          <p:cNvSpPr>
+            <a:spLocks noGrp="1" noRot="1" noChangeAspect="1"/>
+          </p:cNvSpPr>
+          <p:nvPr>
+            <p:ph type="sldImg"/>
+          </p:nvPr>
+        </p:nvSpPr>
+        <p:spPr/>
+      </p:sp>
+      <p:sp>
+        <p:nvSpPr>
+          <p:cNvPr id="3" name="Notes Placeholder 2"/>
+          <p:cNvSpPr>
+            <a:spLocks noGrp="1"/>
+          </p:cNvSpPr>
+          <p:nvPr>
+            <p:ph type="body" idx="1"/>
+          </p:nvPr>
+        </p:nvSpPr>
+        <p:spPr/>
+        <p:txBody>
+          <a:bodyPr/>
+          <a:lstStyle/>
+          <a:p>
+            <a:r>
+              <a:rPr lang="en-US" dirty="0"/>
+              <a:t/>
+            </a:r>
+            <a:endParaRPr lang="en-US" dirty="0"/>
+          </a:p>
+        </p:txBody>
+      </p:sp>
+      <p:sp>
+        <p:nvSpPr>
+          <p:cNvPr id="4" name="Slide Number Placeholder 3"/>
+          <p:cNvSpPr>
+            <a:spLocks noGrp="1"/>
+          </p:cNvSpPr>
+          <p:nvPr>
+            <p:ph type="sldNum" sz="quarter" idx="10"/>
+          </p:nvPr>
+        </p:nvSpPr>
+        <p:spPr/>
+        <p:txBody>
+          <a:bodyPr/>
+          <a:lstStyle/>
+          <a:p>
+            <a:fld id="{F7021451-1387-4CA6-816F-3879F97B5CBC}" type="slidenum">
+              <a:rPr lang="en-US"/>
+              <a:t>10</a:t>
+            </a:fld>
+            <a:endParaRPr lang="en-US"/>
+          </a:p>
+        </p:txBody>
+      </p:sp>
+    </p:spTree>
+    <p:extLst>
+      <p:ext uri="{BB962C8B-B14F-4D97-AF65-F5344CB8AC3E}">
+        <p14:creationId xmlns:p14="http://schemas.microsoft.com/office/powerpoint/2010/main" val="1024086991"/>
+      </p:ext>
+    </p:extLst>
+  </p:cSld>
+  <p:clrMapOvr>
+    <a:masterClrMapping/>
+  </p:clrMapOvr>
+</p:notes>
+</file>
+
 <file path=ppt/notesSlides/notesSlide2.xml><?xml version="1.0" encoding="utf-8"?>
 <p:notes xmlns:a="http://schemas.openxmlformats.org/drawingml/2006/main" xmlns:r="http://schemas.openxmlformats.org/officeDocument/2006/relationships" xmlns:p="http://schemas.openxmlformats.org/presentationml/2006/main">
   <p:cSld>
@@ -1858,6 +1947,855 @@
 </p:sld>
 </file>
 
+<file path=ppt/slides/slide10.xml><?xml version="1.0" encoding="utf-8"?>
+<p:sld xmlns:a="http://schemas.openxmlformats.org/drawingml/2006/main" xmlns:r="http://schemas.openxmlformats.org/officeDocument/2006/relationships" xmlns:p="http://schemas.openxmlformats.org/presentationml/2006/main">
+  <p:cSld name="Slide 10">
+    <p:bg>
+      <p:bgPr>
+        <a:solidFill>
+          <a:srgbClr val="1E2761"/>
+        </a:solidFill>
+      </p:bgPr>
+    </p:bg>
+    <p:spTree>
+      <p:nvGrpSpPr>
+        <p:cNvPr id="1" name=""/>
+        <p:cNvGrpSpPr/>
+        <p:nvPr/>
+      </p:nvGrpSpPr>
+      <p:grpSpPr>
+        <a:xfrm>
+          <a:off x="0" y="0"/>
+          <a:ext cx="0" cy="0"/>
+          <a:chOff x="0" y="0"/>
+          <a:chExt cx="0" cy="0"/>
+        </a:xfrm>
+      </p:grpSpPr>
+      <p:sp>
+        <p:nvSpPr>
+          <p:cNvPr id="2" name="Shape 0"/>
+          <p:cNvSpPr/>
+          <p:nvPr/>
+        </p:nvSpPr>
+        <p:spPr>
+          <a:xfrm>
+            <a:off x="-1828800" y="4114800"/>
+            <a:ext cx="5029200" cy="5029200"/>
+          </a:xfrm>
+          <a:prstGeom prst="ellipse">
+            <a:avLst/>
+          </a:prstGeom>
+          <a:solidFill>
+            <a:srgbClr val="263876"/>
+          </a:solidFill>
+          <a:ln/>
+        </p:spPr>
+      </p:sp>
+      <p:sp>
+        <p:nvSpPr>
+          <p:cNvPr id="3" name="Text 1"/>
+          <p:cNvSpPr/>
+          <p:nvPr/>
+        </p:nvSpPr>
+        <p:spPr>
+          <a:xfrm>
+            <a:off x="822960" y="502920"/>
+            <a:ext cx="10332720" cy="640080"/>
+          </a:xfrm>
+          <a:prstGeom prst="rect">
+            <a:avLst/>
+          </a:prstGeom>
+          <a:noFill/>
+          <a:ln/>
+        </p:spPr>
+        <p:txBody>
+          <a:bodyPr wrap="square" rtlCol="0" anchor="ctr"/>
+          <a:lstStyle/>
+          <a:p>
+            <a:pPr indent="0" marL="0">
+              <a:buNone/>
+            </a:pPr>
+            <a:r>
+              <a:rPr lang="en-US" sz="2800" b="1" dirty="0">
+                <a:solidFill>
+                  <a:srgbClr val="FFFFFF"/>
+                </a:solidFill>
+                <a:latin typeface="Cambria" pitchFamily="34" charset="0"/>
+                <a:ea typeface="Cambria" pitchFamily="34" charset="-122"/>
+                <a:cs typeface="Cambria" pitchFamily="34" charset="-120"/>
+              </a:rPr>
+              <a:t>Siete módulos, una plataforma integral</a:t>
+            </a:r>
+            <a:endParaRPr lang="en-US" sz="2800" dirty="0"/>
+          </a:p>
+        </p:txBody>
+      </p:sp>
+      <p:sp>
+        <p:nvSpPr>
+          <p:cNvPr id="4" name="Shape 2"/>
+          <p:cNvSpPr/>
+          <p:nvPr/>
+        </p:nvSpPr>
+        <p:spPr>
+          <a:xfrm>
+            <a:off x="822960" y="1234440"/>
+            <a:ext cx="2377440" cy="0"/>
+          </a:xfrm>
+          <a:prstGeom prst="line">
+            <a:avLst/>
+          </a:prstGeom>
+          <a:noFill/>
+          <a:ln w="25400">
+            <a:solidFill>
+              <a:srgbClr val="C9A227"/>
+            </a:solidFill>
+            <a:prstDash val="solid"/>
+          </a:ln>
+        </p:spPr>
+      </p:sp>
+      <p:sp>
+        <p:nvSpPr>
+          <p:cNvPr id="5" name="Shape 3"/>
+          <p:cNvSpPr/>
+          <p:nvPr/>
+        </p:nvSpPr>
+        <p:spPr>
+          <a:xfrm>
+            <a:off x="822960" y="1691640"/>
+            <a:ext cx="2542032" cy="1965960"/>
+          </a:xfrm>
+          <a:prstGeom prst="roundRect">
+            <a:avLst>
+              <a:gd name="adj" fmla="val 4651"/>
+            </a:avLst>
+          </a:prstGeom>
+          <a:solidFill>
+            <a:srgbClr val="263876"/>
+          </a:solidFill>
+          <a:ln/>
+        </p:spPr>
+      </p:sp>
+      <p:sp>
+        <p:nvSpPr>
+          <p:cNvPr id="6" name="Shape 4"/>
+          <p:cNvSpPr/>
+          <p:nvPr/>
+        </p:nvSpPr>
+        <p:spPr>
+          <a:xfrm>
+            <a:off x="1042416" y="1911096"/>
+            <a:ext cx="548640" cy="548640"/>
+          </a:xfrm>
+          <a:prstGeom prst="ellipse">
+            <a:avLst/>
+          </a:prstGeom>
+          <a:solidFill>
+            <a:srgbClr val="324A9B"/>
+          </a:solidFill>
+          <a:ln/>
+        </p:spPr>
+      </p:sp>
+      <p:pic>
+        <p:nvPicPr>
+          <p:cNvPr id="7" name="Image 0" descr="icon_search_white.png">    </p:cNvPr>
+          <p:cNvPicPr>
+            <a:picLocks noChangeAspect="1"/>
+          </p:cNvPicPr>
+          <p:nvPr/>
+        </p:nvPicPr>
+        <p:blipFill>
+          <a:blip r:embed="rId1"/>
+          <a:stretch>
+            <a:fillRect/>
+          </a:stretch>
+        </p:blipFill>
+        <p:spPr>
+          <a:xfrm>
+            <a:off x="1185062" y="2053742"/>
+            <a:ext cx="263347" cy="263347"/>
+          </a:xfrm>
+          <a:prstGeom prst="rect">
+            <a:avLst/>
+          </a:prstGeom>
+        </p:spPr>
+      </p:pic>
+      <p:sp>
+        <p:nvSpPr>
+          <p:cNvPr id="8" name="Text 5"/>
+          <p:cNvSpPr/>
+          <p:nvPr/>
+        </p:nvSpPr>
+        <p:spPr>
+          <a:xfrm>
+            <a:off x="1005840" y="2587752"/>
+            <a:ext cx="2176272" cy="914400"/>
+          </a:xfrm>
+          <a:prstGeom prst="rect">
+            <a:avLst/>
+          </a:prstGeom>
+          <a:noFill/>
+          <a:ln/>
+        </p:spPr>
+        <p:txBody>
+          <a:bodyPr wrap="square" rtlCol="0" anchor="ctr"/>
+          <a:lstStyle/>
+          <a:p>
+            <a:pPr indent="0" marL="0">
+              <a:buNone/>
+            </a:pPr>
+            <a:r>
+              <a:rPr lang="en-US" sz="1150" b="1" dirty="0">
+                <a:solidFill>
+                  <a:srgbClr val="FFFFFF"/>
+                </a:solidFill>
+                <a:latin typeface="Calibri" pitchFamily="34" charset="0"/>
+                <a:ea typeface="Calibri" pitchFamily="34" charset="-122"/>
+                <a:cs typeface="Calibri" pitchFamily="34" charset="-120"/>
+              </a:rPr>
+              <a:t>Comprobaciones</a:t>
+            </a:r>
+            <a:endParaRPr lang="en-US" sz="1150" dirty="0"/>
+          </a:p>
+        </p:txBody>
+      </p:sp>
+      <p:sp>
+        <p:nvSpPr>
+          <p:cNvPr id="9" name="Shape 6"/>
+          <p:cNvSpPr/>
+          <p:nvPr/>
+        </p:nvSpPr>
+        <p:spPr>
+          <a:xfrm>
+            <a:off x="3621024" y="1691640"/>
+            <a:ext cx="2542032" cy="1965960"/>
+          </a:xfrm>
+          <a:prstGeom prst="roundRect">
+            <a:avLst>
+              <a:gd name="adj" fmla="val 4651"/>
+            </a:avLst>
+          </a:prstGeom>
+          <a:solidFill>
+            <a:srgbClr val="263876"/>
+          </a:solidFill>
+          <a:ln/>
+        </p:spPr>
+      </p:sp>
+      <p:sp>
+        <p:nvSpPr>
+          <p:cNvPr id="10" name="Shape 7"/>
+          <p:cNvSpPr/>
+          <p:nvPr/>
+        </p:nvSpPr>
+        <p:spPr>
+          <a:xfrm>
+            <a:off x="3840480" y="1911096"/>
+            <a:ext cx="548640" cy="548640"/>
+          </a:xfrm>
+          <a:prstGeom prst="ellipse">
+            <a:avLst/>
+          </a:prstGeom>
+          <a:solidFill>
+            <a:srgbClr val="324A9B"/>
+          </a:solidFill>
+          <a:ln/>
+        </p:spPr>
+      </p:sp>
+      <p:pic>
+        <p:nvPicPr>
+          <p:cNvPr id="11" name="Image 1" descr="icon_sliders_white.png">    </p:cNvPr>
+          <p:cNvPicPr>
+            <a:picLocks noChangeAspect="1"/>
+          </p:cNvPicPr>
+          <p:nvPr/>
+        </p:nvPicPr>
+        <p:blipFill>
+          <a:blip r:embed="rId2"/>
+          <a:stretch>
+            <a:fillRect/>
+          </a:stretch>
+        </p:blipFill>
+        <p:spPr>
+          <a:xfrm>
+            <a:off x="3983126" y="2053742"/>
+            <a:ext cx="263347" cy="263347"/>
+          </a:xfrm>
+          <a:prstGeom prst="rect">
+            <a:avLst/>
+          </a:prstGeom>
+        </p:spPr>
+      </p:pic>
+      <p:sp>
+        <p:nvSpPr>
+          <p:cNvPr id="12" name="Text 8"/>
+          <p:cNvSpPr/>
+          <p:nvPr/>
+        </p:nvSpPr>
+        <p:spPr>
+          <a:xfrm>
+            <a:off x="3803904" y="2587752"/>
+            <a:ext cx="2176272" cy="914400"/>
+          </a:xfrm>
+          <a:prstGeom prst="rect">
+            <a:avLst/>
+          </a:prstGeom>
+          <a:noFill/>
+          <a:ln/>
+        </p:spPr>
+        <p:txBody>
+          <a:bodyPr wrap="square" rtlCol="0" anchor="ctr"/>
+          <a:lstStyle/>
+          <a:p>
+            <a:pPr indent="0" marL="0">
+              <a:buNone/>
+            </a:pPr>
+            <a:r>
+              <a:rPr lang="en-US" sz="1150" b="1" dirty="0">
+                <a:solidFill>
+                  <a:srgbClr val="FFFFFF"/>
+                </a:solidFill>
+                <a:latin typeface="Calibri" pitchFamily="34" charset="0"/>
+                <a:ea typeface="Calibri" pitchFamily="34" charset="-122"/>
+                <a:cs typeface="Calibri" pitchFamily="34" charset="-120"/>
+              </a:rPr>
+              <a:t>Parámetros Técnicos</a:t>
+            </a:r>
+            <a:endParaRPr lang="en-US" sz="1150" dirty="0"/>
+          </a:p>
+        </p:txBody>
+      </p:sp>
+      <p:sp>
+        <p:nvSpPr>
+          <p:cNvPr id="13" name="Shape 9"/>
+          <p:cNvSpPr/>
+          <p:nvPr/>
+        </p:nvSpPr>
+        <p:spPr>
+          <a:xfrm>
+            <a:off x="6419088" y="1691640"/>
+            <a:ext cx="2542032" cy="1965960"/>
+          </a:xfrm>
+          <a:prstGeom prst="roundRect">
+            <a:avLst>
+              <a:gd name="adj" fmla="val 4651"/>
+            </a:avLst>
+          </a:prstGeom>
+          <a:solidFill>
+            <a:srgbClr val="263876"/>
+          </a:solidFill>
+          <a:ln/>
+        </p:spPr>
+      </p:sp>
+      <p:sp>
+        <p:nvSpPr>
+          <p:cNvPr id="14" name="Shape 10"/>
+          <p:cNvSpPr/>
+          <p:nvPr/>
+        </p:nvSpPr>
+        <p:spPr>
+          <a:xfrm>
+            <a:off x="6638544" y="1911096"/>
+            <a:ext cx="548640" cy="548640"/>
+          </a:xfrm>
+          <a:prstGeom prst="ellipse">
+            <a:avLst/>
+          </a:prstGeom>
+          <a:solidFill>
+            <a:srgbClr val="324A9B"/>
+          </a:solidFill>
+          <a:ln/>
+        </p:spPr>
+      </p:sp>
+      <p:pic>
+        <p:nvPicPr>
+          <p:cNvPr id="15" name="Image 2" descr="icon_target_white.png">    </p:cNvPr>
+          <p:cNvPicPr>
+            <a:picLocks noChangeAspect="1"/>
+          </p:cNvPicPr>
+          <p:nvPr/>
+        </p:nvPicPr>
+        <p:blipFill>
+          <a:blip r:embed="rId3"/>
+          <a:stretch>
+            <a:fillRect/>
+          </a:stretch>
+        </p:blipFill>
+        <p:spPr>
+          <a:xfrm>
+            <a:off x="6781190" y="2053742"/>
+            <a:ext cx="263347" cy="263347"/>
+          </a:xfrm>
+          <a:prstGeom prst="rect">
+            <a:avLst/>
+          </a:prstGeom>
+        </p:spPr>
+      </p:pic>
+      <p:sp>
+        <p:nvSpPr>
+          <p:cNvPr id="16" name="Text 11"/>
+          <p:cNvSpPr/>
+          <p:nvPr/>
+        </p:nvSpPr>
+        <p:spPr>
+          <a:xfrm>
+            <a:off x="6601968" y="2587752"/>
+            <a:ext cx="2176272" cy="914400"/>
+          </a:xfrm>
+          <a:prstGeom prst="rect">
+            <a:avLst/>
+          </a:prstGeom>
+          <a:noFill/>
+          <a:ln/>
+        </p:spPr>
+        <p:txBody>
+          <a:bodyPr wrap="square" rtlCol="0" anchor="ctr"/>
+          <a:lstStyle/>
+          <a:p>
+            <a:pPr indent="0" marL="0">
+              <a:buNone/>
+            </a:pPr>
+            <a:r>
+              <a:rPr lang="en-US" sz="1150" b="1" dirty="0">
+                <a:solidFill>
+                  <a:srgbClr val="FFFFFF"/>
+                </a:solidFill>
+                <a:latin typeface="Calibri" pitchFamily="34" charset="0"/>
+                <a:ea typeface="Calibri" pitchFamily="34" charset="-122"/>
+                <a:cs typeface="Calibri" pitchFamily="34" charset="-120"/>
+              </a:rPr>
+              <a:t>Selección por Parámetros Técnicos</a:t>
+            </a:r>
+            <a:endParaRPr lang="en-US" sz="1150" dirty="0"/>
+          </a:p>
+        </p:txBody>
+      </p:sp>
+      <p:sp>
+        <p:nvSpPr>
+          <p:cNvPr id="17" name="Shape 12"/>
+          <p:cNvSpPr/>
+          <p:nvPr/>
+        </p:nvSpPr>
+        <p:spPr>
+          <a:xfrm>
+            <a:off x="9217152" y="1691640"/>
+            <a:ext cx="2542032" cy="1965960"/>
+          </a:xfrm>
+          <a:prstGeom prst="roundRect">
+            <a:avLst>
+              <a:gd name="adj" fmla="val 4651"/>
+            </a:avLst>
+          </a:prstGeom>
+          <a:solidFill>
+            <a:srgbClr val="263876"/>
+          </a:solidFill>
+          <a:ln/>
+        </p:spPr>
+      </p:sp>
+      <p:sp>
+        <p:nvSpPr>
+          <p:cNvPr id="18" name="Shape 13"/>
+          <p:cNvSpPr/>
+          <p:nvPr/>
+        </p:nvSpPr>
+        <p:spPr>
+          <a:xfrm>
+            <a:off x="9436608" y="1911096"/>
+            <a:ext cx="548640" cy="548640"/>
+          </a:xfrm>
+          <a:prstGeom prst="ellipse">
+            <a:avLst/>
+          </a:prstGeom>
+          <a:solidFill>
+            <a:srgbClr val="324A9B"/>
+          </a:solidFill>
+          <a:ln/>
+        </p:spPr>
+      </p:sp>
+      <p:pic>
+        <p:nvPicPr>
+          <p:cNvPr id="19" name="Image 3" descr="icon_shuffle_white.png">    </p:cNvPr>
+          <p:cNvPicPr>
+            <a:picLocks noChangeAspect="1"/>
+          </p:cNvPicPr>
+          <p:nvPr/>
+        </p:nvPicPr>
+        <p:blipFill>
+          <a:blip r:embed="rId4"/>
+          <a:stretch>
+            <a:fillRect/>
+          </a:stretch>
+        </p:blipFill>
+        <p:spPr>
+          <a:xfrm>
+            <a:off x="9579254" y="2053742"/>
+            <a:ext cx="263347" cy="263347"/>
+          </a:xfrm>
+          <a:prstGeom prst="rect">
+            <a:avLst/>
+          </a:prstGeom>
+        </p:spPr>
+      </p:pic>
+      <p:sp>
+        <p:nvSpPr>
+          <p:cNvPr id="20" name="Text 14"/>
+          <p:cNvSpPr/>
+          <p:nvPr/>
+        </p:nvSpPr>
+        <p:spPr>
+          <a:xfrm>
+            <a:off x="9400032" y="2587752"/>
+            <a:ext cx="2176272" cy="914400"/>
+          </a:xfrm>
+          <a:prstGeom prst="rect">
+            <a:avLst/>
+          </a:prstGeom>
+          <a:noFill/>
+          <a:ln/>
+        </p:spPr>
+        <p:txBody>
+          <a:bodyPr wrap="square" rtlCol="0" anchor="ctr"/>
+          <a:lstStyle/>
+          <a:p>
+            <a:pPr indent="0" marL="0">
+              <a:buNone/>
+            </a:pPr>
+            <a:r>
+              <a:rPr lang="en-US" sz="1150" b="1" dirty="0">
+                <a:solidFill>
+                  <a:srgbClr val="FFFFFF"/>
+                </a:solidFill>
+                <a:latin typeface="Calibri" pitchFamily="34" charset="0"/>
+                <a:ea typeface="Calibri" pitchFamily="34" charset="-122"/>
+                <a:cs typeface="Calibri" pitchFamily="34" charset="-120"/>
+              </a:rPr>
+              <a:t>Criterios Alternativos</a:t>
+            </a:r>
+            <a:endParaRPr lang="en-US" sz="1150" dirty="0"/>
+          </a:p>
+        </p:txBody>
+      </p:sp>
+      <p:sp>
+        <p:nvSpPr>
+          <p:cNvPr id="21" name="Shape 15"/>
+          <p:cNvSpPr/>
+          <p:nvPr/>
+        </p:nvSpPr>
+        <p:spPr>
+          <a:xfrm>
+            <a:off x="822960" y="3913632"/>
+            <a:ext cx="2542032" cy="1965960"/>
+          </a:xfrm>
+          <a:prstGeom prst="roundRect">
+            <a:avLst>
+              <a:gd name="adj" fmla="val 4651"/>
+            </a:avLst>
+          </a:prstGeom>
+          <a:solidFill>
+            <a:srgbClr val="263876"/>
+          </a:solidFill>
+          <a:ln/>
+        </p:spPr>
+      </p:sp>
+      <p:sp>
+        <p:nvSpPr>
+          <p:cNvPr id="22" name="Shape 16"/>
+          <p:cNvSpPr/>
+          <p:nvPr/>
+        </p:nvSpPr>
+        <p:spPr>
+          <a:xfrm>
+            <a:off x="1042416" y="4133088"/>
+            <a:ext cx="548640" cy="548640"/>
+          </a:xfrm>
+          <a:prstGeom prst="ellipse">
+            <a:avLst/>
+          </a:prstGeom>
+          <a:solidFill>
+            <a:srgbClr val="324A9B"/>
+          </a:solidFill>
+          <a:ln/>
+        </p:spPr>
+      </p:sp>
+      <p:pic>
+        <p:nvPicPr>
+          <p:cNvPr id="23" name="Image 4" descr="icon_activity_white.png">    </p:cNvPr>
+          <p:cNvPicPr>
+            <a:picLocks noChangeAspect="1"/>
+          </p:cNvPicPr>
+          <p:nvPr/>
+        </p:nvPicPr>
+        <p:blipFill>
+          <a:blip r:embed="rId5"/>
+          <a:stretch>
+            <a:fillRect/>
+          </a:stretch>
+        </p:blipFill>
+        <p:spPr>
+          <a:xfrm>
+            <a:off x="1185062" y="4275734"/>
+            <a:ext cx="263347" cy="263347"/>
+          </a:xfrm>
+          <a:prstGeom prst="rect">
+            <a:avLst/>
+          </a:prstGeom>
+        </p:spPr>
+      </p:pic>
+      <p:sp>
+        <p:nvSpPr>
+          <p:cNvPr id="24" name="Text 17"/>
+          <p:cNvSpPr/>
+          <p:nvPr/>
+        </p:nvSpPr>
+        <p:spPr>
+          <a:xfrm>
+            <a:off x="1005840" y="4809744"/>
+            <a:ext cx="2176272" cy="914400"/>
+          </a:xfrm>
+          <a:prstGeom prst="rect">
+            <a:avLst/>
+          </a:prstGeom>
+          <a:noFill/>
+          <a:ln/>
+        </p:spPr>
+        <p:txBody>
+          <a:bodyPr wrap="square" rtlCol="0" anchor="ctr"/>
+          <a:lstStyle/>
+          <a:p>
+            <a:pPr indent="0" marL="0">
+              <a:buNone/>
+            </a:pPr>
+            <a:r>
+              <a:rPr lang="en-US" sz="1150" b="1" dirty="0">
+                <a:solidFill>
+                  <a:srgbClr val="FFFFFF"/>
+                </a:solidFill>
+                <a:latin typeface="Calibri" pitchFamily="34" charset="0"/>
+                <a:ea typeface="Calibri" pitchFamily="34" charset="-122"/>
+                <a:cs typeface="Calibri" pitchFamily="34" charset="-120"/>
+              </a:rPr>
+              <a:t>Módulo de Análisis</a:t>
+            </a:r>
+            <a:endParaRPr lang="en-US" sz="1150" dirty="0"/>
+          </a:p>
+        </p:txBody>
+      </p:sp>
+      <p:sp>
+        <p:nvSpPr>
+          <p:cNvPr id="25" name="Shape 18"/>
+          <p:cNvSpPr/>
+          <p:nvPr/>
+        </p:nvSpPr>
+        <p:spPr>
+          <a:xfrm>
+            <a:off x="3621024" y="3913632"/>
+            <a:ext cx="2542032" cy="1965960"/>
+          </a:xfrm>
+          <a:prstGeom prst="roundRect">
+            <a:avLst>
+              <a:gd name="adj" fmla="val 4651"/>
+            </a:avLst>
+          </a:prstGeom>
+          <a:solidFill>
+            <a:srgbClr val="263876"/>
+          </a:solidFill>
+          <a:ln/>
+        </p:spPr>
+      </p:sp>
+      <p:sp>
+        <p:nvSpPr>
+          <p:cNvPr id="26" name="Shape 19"/>
+          <p:cNvSpPr/>
+          <p:nvPr/>
+        </p:nvSpPr>
+        <p:spPr>
+          <a:xfrm>
+            <a:off x="3840480" y="4133088"/>
+            <a:ext cx="548640" cy="548640"/>
+          </a:xfrm>
+          <a:prstGeom prst="ellipse">
+            <a:avLst/>
+          </a:prstGeom>
+          <a:solidFill>
+            <a:srgbClr val="324A9B"/>
+          </a:solidFill>
+          <a:ln/>
+        </p:spPr>
+      </p:sp>
+      <p:pic>
+        <p:nvPicPr>
+          <p:cNvPr id="27" name="Image 5" descr="icon_alert_white.png">    </p:cNvPr>
+          <p:cNvPicPr>
+            <a:picLocks noChangeAspect="1"/>
+          </p:cNvPicPr>
+          <p:nvPr/>
+        </p:nvPicPr>
+        <p:blipFill>
+          <a:blip r:embed="rId6"/>
+          <a:stretch>
+            <a:fillRect/>
+          </a:stretch>
+        </p:blipFill>
+        <p:spPr>
+          <a:xfrm>
+            <a:off x="3983126" y="4275734"/>
+            <a:ext cx="263347" cy="263347"/>
+          </a:xfrm>
+          <a:prstGeom prst="rect">
+            <a:avLst/>
+          </a:prstGeom>
+        </p:spPr>
+      </p:pic>
+      <p:sp>
+        <p:nvSpPr>
+          <p:cNvPr id="28" name="Text 20"/>
+          <p:cNvSpPr/>
+          <p:nvPr/>
+        </p:nvSpPr>
+        <p:spPr>
+          <a:xfrm>
+            <a:off x="3803904" y="4809744"/>
+            <a:ext cx="2176272" cy="914400"/>
+          </a:xfrm>
+          <a:prstGeom prst="rect">
+            <a:avLst/>
+          </a:prstGeom>
+          <a:noFill/>
+          <a:ln/>
+        </p:spPr>
+        <p:txBody>
+          <a:bodyPr wrap="square" rtlCol="0" anchor="ctr"/>
+          <a:lstStyle/>
+          <a:p>
+            <a:pPr indent="0" marL="0">
+              <a:buNone/>
+            </a:pPr>
+            <a:r>
+              <a:rPr lang="en-US" sz="1150" b="1" dirty="0">
+                <a:solidFill>
+                  <a:srgbClr val="FFFFFF"/>
+                </a:solidFill>
+                <a:latin typeface="Calibri" pitchFamily="34" charset="0"/>
+                <a:ea typeface="Calibri" pitchFamily="34" charset="-122"/>
+                <a:cs typeface="Calibri" pitchFamily="34" charset="-120"/>
+              </a:rPr>
+              <a:t>Anomalías de Flujo de Dinero Bajo</a:t>
+            </a:r>
+            <a:endParaRPr lang="en-US" sz="1150" dirty="0"/>
+          </a:p>
+        </p:txBody>
+      </p:sp>
+      <p:sp>
+        <p:nvSpPr>
+          <p:cNvPr id="29" name="Shape 21"/>
+          <p:cNvSpPr/>
+          <p:nvPr/>
+        </p:nvSpPr>
+        <p:spPr>
+          <a:xfrm>
+            <a:off x="6419088" y="3913632"/>
+            <a:ext cx="2542032" cy="1965960"/>
+          </a:xfrm>
+          <a:prstGeom prst="roundRect">
+            <a:avLst>
+              <a:gd name="adj" fmla="val 4651"/>
+            </a:avLst>
+          </a:prstGeom>
+          <a:solidFill>
+            <a:srgbClr val="263876"/>
+          </a:solidFill>
+          <a:ln/>
+        </p:spPr>
+      </p:sp>
+      <p:sp>
+        <p:nvSpPr>
+          <p:cNvPr id="30" name="Shape 22"/>
+          <p:cNvSpPr/>
+          <p:nvPr/>
+        </p:nvSpPr>
+        <p:spPr>
+          <a:xfrm>
+            <a:off x="6638544" y="4133088"/>
+            <a:ext cx="548640" cy="548640"/>
+          </a:xfrm>
+          <a:prstGeom prst="ellipse">
+            <a:avLst/>
+          </a:prstGeom>
+          <a:solidFill>
+            <a:srgbClr val="324A9B"/>
+          </a:solidFill>
+          <a:ln/>
+        </p:spPr>
+      </p:sp>
+      <p:pic>
+        <p:nvPicPr>
+          <p:cNvPr id="31" name="Image 6" descr="icon_cpu_white.png">    </p:cNvPr>
+          <p:cNvPicPr>
+            <a:picLocks noChangeAspect="1"/>
+          </p:cNvPicPr>
+          <p:nvPr/>
+        </p:nvPicPr>
+        <p:blipFill>
+          <a:blip r:embed="rId7"/>
+          <a:stretch>
+            <a:fillRect/>
+          </a:stretch>
+        </p:blipFill>
+        <p:spPr>
+          <a:xfrm>
+            <a:off x="6781190" y="4275734"/>
+            <a:ext cx="263347" cy="263347"/>
+          </a:xfrm>
+          <a:prstGeom prst="rect">
+            <a:avLst/>
+          </a:prstGeom>
+        </p:spPr>
+      </p:pic>
+      <p:sp>
+        <p:nvSpPr>
+          <p:cNvPr id="32" name="Text 23"/>
+          <p:cNvSpPr/>
+          <p:nvPr/>
+        </p:nvSpPr>
+        <p:spPr>
+          <a:xfrm>
+            <a:off x="6601968" y="4809744"/>
+            <a:ext cx="2176272" cy="914400"/>
+          </a:xfrm>
+          <a:prstGeom prst="rect">
+            <a:avLst/>
+          </a:prstGeom>
+          <a:noFill/>
+          <a:ln/>
+        </p:spPr>
+        <p:txBody>
+          <a:bodyPr wrap="square" rtlCol="0" anchor="ctr"/>
+          <a:lstStyle/>
+          <a:p>
+            <a:pPr indent="0" marL="0">
+              <a:buNone/>
+            </a:pPr>
+            <a:r>
+              <a:rPr lang="en-US" sz="1150" b="1" dirty="0">
+                <a:solidFill>
+                  <a:srgbClr val="FFFFFF"/>
+                </a:solidFill>
+                <a:latin typeface="Calibri" pitchFamily="34" charset="0"/>
+                <a:ea typeface="Calibri" pitchFamily="34" charset="-122"/>
+                <a:cs typeface="Calibri" pitchFamily="34" charset="-120"/>
+              </a:rPr>
+              <a:t>Comparación con Red Neuronal</a:t>
+            </a:r>
+            <a:endParaRPr lang="en-US" sz="1150" dirty="0"/>
+          </a:p>
+        </p:txBody>
+      </p:sp>
+    </p:spTree>
+  </p:cSld>
+  <p:clrMapOvr>
+    <a:masterClrMapping/>
+  </p:clrMapOvr>
+</p:sld>
+</file>
+
 <file path=ppt/slides/slide2.xml><?xml version="1.0" encoding="utf-8"?>
 <p:sld xmlns:a="http://schemas.openxmlformats.org/drawingml/2006/main" xmlns:r="http://schemas.openxmlformats.org/officeDocument/2006/relationships" xmlns:p="http://schemas.openxmlformats.org/presentationml/2006/main">
   <p:cSld name="Slide 2">
@@ -7793,7 +8731,7 @@
     <p:bg>
       <p:bgPr>
         <a:solidFill>
-          <a:srgbClr val="1E2761"/>
+          <a:srgbClr val="FFFFFF"/>
         </a:solidFill>
       </p:bgPr>
     </p:bg>
@@ -7819,125 +8757,21 @@
         </p:nvSpPr>
         <p:spPr>
           <a:xfrm>
-            <a:off x="-1828800" y="4114800"/>
-            <a:ext cx="5029200" cy="5029200"/>
+            <a:off x="640080" y="548640"/>
+            <a:ext cx="914400" cy="914400"/>
           </a:xfrm>
           <a:prstGeom prst="ellipse">
             <a:avLst/>
           </a:prstGeom>
           <a:solidFill>
-            <a:srgbClr val="263876"/>
-          </a:solidFill>
-          <a:ln/>
-        </p:spPr>
-      </p:sp>
-      <p:sp>
-        <p:nvSpPr>
-          <p:cNvPr id="3" name="Text 1"/>
-          <p:cNvSpPr/>
-          <p:nvPr/>
-        </p:nvSpPr>
-        <p:spPr>
-          <a:xfrm>
-            <a:off x="822960" y="640080"/>
-            <a:ext cx="10332720" cy="640080"/>
-          </a:xfrm>
-          <a:prstGeom prst="rect">
-            <a:avLst/>
-          </a:prstGeom>
-          <a:noFill/>
-          <a:ln/>
-        </p:spPr>
-        <p:txBody>
-          <a:bodyPr wrap="square" rtlCol="0" anchor="ctr"/>
-          <a:lstStyle/>
-          <a:p>
-            <a:pPr indent="0" marL="0">
-              <a:buNone/>
-            </a:pPr>
-            <a:r>
-              <a:rPr lang="en-US" sz="2800" b="1" dirty="0">
-                <a:solidFill>
-                  <a:srgbClr val="FFFFFF"/>
-                </a:solidFill>
-                <a:latin typeface="Cambria" pitchFamily="34" charset="0"/>
-                <a:ea typeface="Cambria" pitchFamily="34" charset="-122"/>
-                <a:cs typeface="Cambria" pitchFamily="34" charset="-120"/>
-              </a:rPr>
-              <a:t>Seis módulos, una plataforma integral</a:t>
-            </a:r>
-            <a:endParaRPr lang="en-US" sz="2800" dirty="0"/>
-          </a:p>
-        </p:txBody>
-      </p:sp>
-      <p:sp>
-        <p:nvSpPr>
-          <p:cNvPr id="4" name="Shape 2"/>
-          <p:cNvSpPr/>
-          <p:nvPr/>
-        </p:nvSpPr>
-        <p:spPr>
-          <a:xfrm>
-            <a:off x="822960" y="1371600"/>
-            <a:ext cx="2377440" cy="0"/>
-          </a:xfrm>
-          <a:prstGeom prst="line">
-            <a:avLst/>
-          </a:prstGeom>
-          <a:noFill/>
-          <a:ln w="25400">
-            <a:solidFill>
-              <a:srgbClr val="C9A227"/>
-            </a:solidFill>
-            <a:prstDash val="solid"/>
-          </a:ln>
-        </p:spPr>
-      </p:sp>
-      <p:sp>
-        <p:nvSpPr>
-          <p:cNvPr id="5" name="Shape 3"/>
-          <p:cNvSpPr/>
-          <p:nvPr/>
-        </p:nvSpPr>
-        <p:spPr>
-          <a:xfrm>
-            <a:off x="822960" y="1828800"/>
-            <a:ext cx="3383280" cy="2148840"/>
-          </a:xfrm>
-          <a:prstGeom prst="roundRect">
-            <a:avLst>
-              <a:gd name="adj" fmla="val 4255"/>
-            </a:avLst>
-          </a:prstGeom>
-          <a:solidFill>
-            <a:srgbClr val="263876"/>
-          </a:solidFill>
-          <a:ln/>
-        </p:spPr>
-      </p:sp>
-      <p:sp>
-        <p:nvSpPr>
-          <p:cNvPr id="6" name="Shape 4"/>
-          <p:cNvSpPr/>
-          <p:nvPr/>
-        </p:nvSpPr>
-        <p:spPr>
-          <a:xfrm>
-            <a:off x="1078992" y="2084832"/>
-            <a:ext cx="640080" cy="640080"/>
-          </a:xfrm>
-          <a:prstGeom prst="ellipse">
-            <a:avLst/>
-          </a:prstGeom>
-          <a:solidFill>
-            <a:srgbClr val="324A9B"/>
+            <a:srgbClr val="1E2761"/>
           </a:solidFill>
           <a:ln/>
         </p:spPr>
       </p:sp>
       <p:pic>
         <p:nvPicPr>
-          <p:cNvPr id="7" name="Image 0" descr="icon_search_white.png">    </p:cNvPr>
+          <p:cNvPr id="3" name="Image 0" descr="icon_cpu_white.png">    </p:cNvPr>
           <p:cNvPicPr>
             <a:picLocks noChangeAspect="1"/>
           </p:cNvPicPr>
@@ -7951,8 +8785,8 @@
         </p:blipFill>
         <p:spPr>
           <a:xfrm>
-            <a:off x="1245413" y="2251253"/>
-            <a:ext cx="307238" cy="307238"/>
+            <a:off x="877824" y="786384"/>
+            <a:ext cx="438912" cy="438912"/>
           </a:xfrm>
           <a:prstGeom prst="rect">
             <a:avLst/>
@@ -7961,88 +8795,194 @@
       </p:pic>
       <p:sp>
         <p:nvSpPr>
-          <p:cNvPr id="8" name="Text 5"/>
-          <p:cNvSpPr/>
-          <p:nvPr/>
-        </p:nvSpPr>
-        <p:spPr>
-          <a:xfrm>
-            <a:off x="1051560" y="2880360"/>
-            <a:ext cx="2926080" cy="960120"/>
-          </a:xfrm>
-          <a:prstGeom prst="rect">
-            <a:avLst/>
-          </a:prstGeom>
-          <a:noFill/>
-          <a:ln/>
-        </p:spPr>
-        <p:txBody>
-          <a:bodyPr wrap="square" rtlCol="0" anchor="ctr"/>
-          <a:lstStyle/>
-          <a:p>
-            <a:pPr indent="0" marL="0">
-              <a:buNone/>
-            </a:pPr>
-            <a:r>
-              <a:rPr lang="en-US" sz="1300" b="1" dirty="0">
-                <a:solidFill>
-                  <a:srgbClr val="FFFFFF"/>
+          <p:cNvPr id="4" name="Text 1"/>
+          <p:cNvSpPr/>
+          <p:nvPr/>
+        </p:nvSpPr>
+        <p:spPr>
+          <a:xfrm>
+            <a:off x="1783080" y="502920"/>
+            <a:ext cx="9692640" cy="640080"/>
+          </a:xfrm>
+          <a:prstGeom prst="rect">
+            <a:avLst/>
+          </a:prstGeom>
+          <a:noFill/>
+          <a:ln/>
+        </p:spPr>
+        <p:txBody>
+          <a:bodyPr wrap="square" rtlCol="0" anchor="ctr"/>
+          <a:lstStyle/>
+          <a:p>
+            <a:pPr indent="0" marL="0">
+              <a:buNone/>
+            </a:pPr>
+            <a:r>
+              <a:rPr lang="en-US" sz="2200" b="1" dirty="0">
+                <a:solidFill>
+                  <a:srgbClr val="1E2761"/>
+                </a:solidFill>
+                <a:latin typeface="Cambria" pitchFamily="34" charset="0"/>
+                <a:ea typeface="Cambria" pitchFamily="34" charset="-122"/>
+                <a:cs typeface="Cambria" pitchFamily="34" charset="-120"/>
+              </a:rPr>
+              <a:t>Módulo 7 · Comparación con Red Neuronal</a:t>
+            </a:r>
+            <a:endParaRPr lang="en-US" sz="2200" dirty="0"/>
+          </a:p>
+        </p:txBody>
+      </p:sp>
+      <p:sp>
+        <p:nvSpPr>
+          <p:cNvPr id="5" name="Text 2"/>
+          <p:cNvSpPr/>
+          <p:nvPr/>
+        </p:nvSpPr>
+        <p:spPr>
+          <a:xfrm>
+            <a:off x="1783080" y="1097280"/>
+            <a:ext cx="9418320" cy="365760"/>
+          </a:xfrm>
+          <a:prstGeom prst="rect">
+            <a:avLst/>
+          </a:prstGeom>
+          <a:noFill/>
+          <a:ln/>
+        </p:spPr>
+        <p:txBody>
+          <a:bodyPr wrap="square" rtlCol="0" anchor="ctr"/>
+          <a:lstStyle/>
+          <a:p>
+            <a:pPr indent="0" marL="0">
+              <a:buNone/>
+            </a:pPr>
+            <a:r>
+              <a:rPr lang="en-US" sz="1250" i="1" dirty="0">
+                <a:solidFill>
+                  <a:srgbClr val="4A4A4A"/>
                 </a:solidFill>
                 <a:latin typeface="Calibri" pitchFamily="34" charset="0"/>
                 <a:ea typeface="Calibri" pitchFamily="34" charset="-122"/>
                 <a:cs typeface="Calibri" pitchFamily="34" charset="-120"/>
               </a:rPr>
-              <a:t>Comprobaciones</a:t>
-            </a:r>
-            <a:endParaRPr lang="en-US" sz="1300" dirty="0"/>
-          </a:p>
-        </p:txBody>
-      </p:sp>
-      <p:sp>
-        <p:nvSpPr>
-          <p:cNvPr id="9" name="Shape 6"/>
-          <p:cNvSpPr/>
-          <p:nvPr/>
-        </p:nvSpPr>
-        <p:spPr>
-          <a:xfrm>
-            <a:off x="4526280" y="1828800"/>
-            <a:ext cx="3383280" cy="2148840"/>
+              <a:t>Experimento controlado para calibrar dos formas de aprender a puntuar valores</a:t>
+            </a:r>
+            <a:endParaRPr lang="en-US" sz="1250" dirty="0"/>
+          </a:p>
+        </p:txBody>
+      </p:sp>
+      <p:sp>
+        <p:nvSpPr>
+          <p:cNvPr id="6" name="Shape 3"/>
+          <p:cNvSpPr/>
+          <p:nvPr/>
+        </p:nvSpPr>
+        <p:spPr>
+          <a:xfrm>
+            <a:off x="640080" y="1645920"/>
+            <a:ext cx="10881360" cy="0"/>
+          </a:xfrm>
+          <a:prstGeom prst="line">
+            <a:avLst/>
+          </a:prstGeom>
+          <a:noFill/>
+          <a:ln w="12700">
+            <a:solidFill>
+              <a:srgbClr val="E0E6F0"/>
+            </a:solidFill>
+            <a:prstDash val="solid"/>
+          </a:ln>
+        </p:spPr>
+      </p:sp>
+      <p:sp>
+        <p:nvSpPr>
+          <p:cNvPr id="7" name="Text 4"/>
+          <p:cNvSpPr/>
+          <p:nvPr/>
+        </p:nvSpPr>
+        <p:spPr>
+          <a:xfrm>
+            <a:off x="640080" y="1828800"/>
+            <a:ext cx="10881360" cy="320040"/>
+          </a:xfrm>
+          <a:prstGeom prst="rect">
+            <a:avLst/>
+          </a:prstGeom>
+          <a:noFill/>
+          <a:ln/>
+        </p:spPr>
+        <p:txBody>
+          <a:bodyPr wrap="square" rtlCol="0" anchor="ctr"/>
+          <a:lstStyle/>
+          <a:p>
+            <a:pPr indent="0" marL="0">
+              <a:buNone/>
+            </a:pPr>
+            <a:r>
+              <a:rPr lang="en-US" sz="1200" b="1" spc="100" kern="0" dirty="0">
+                <a:solidFill>
+                  <a:srgbClr val="C9A227"/>
+                </a:solidFill>
+                <a:latin typeface="Calibri" pitchFamily="34" charset="0"/>
+                <a:ea typeface="Calibri" pitchFamily="34" charset="-122"/>
+                <a:cs typeface="Calibri" pitchFamily="34" charset="-120"/>
+              </a:rPr>
+              <a:t>DOS MODELOS, MISMA VALIDACIÓN WALK-FORWARD</a:t>
+            </a:r>
+            <a:endParaRPr lang="en-US" sz="1200" dirty="0"/>
+          </a:p>
+        </p:txBody>
+      </p:sp>
+      <p:sp>
+        <p:nvSpPr>
+          <p:cNvPr id="8" name="Shape 5"/>
+          <p:cNvSpPr/>
+          <p:nvPr/>
+        </p:nvSpPr>
+        <p:spPr>
+          <a:xfrm>
+            <a:off x="640080" y="2194560"/>
+            <a:ext cx="5257800" cy="1417320"/>
           </a:xfrm>
           <a:prstGeom prst="roundRect">
             <a:avLst>
-              <a:gd name="adj" fmla="val 4255"/>
+              <a:gd name="adj" fmla="val 6452"/>
             </a:avLst>
           </a:prstGeom>
           <a:solidFill>
-            <a:srgbClr val="263876"/>
-          </a:solidFill>
-          <a:ln/>
-        </p:spPr>
-      </p:sp>
-      <p:sp>
-        <p:nvSpPr>
-          <p:cNvPr id="10" name="Shape 7"/>
-          <p:cNvSpPr/>
-          <p:nvPr/>
-        </p:nvSpPr>
-        <p:spPr>
-          <a:xfrm>
-            <a:off x="4782312" y="2084832"/>
-            <a:ext cx="640080" cy="640080"/>
+            <a:srgbClr val="F7F9FC"/>
+          </a:solidFill>
+          <a:ln w="12700">
+            <a:solidFill>
+              <a:srgbClr val="E0E6F0"/>
+            </a:solidFill>
+            <a:prstDash val="solid"/>
+          </a:ln>
+        </p:spPr>
+      </p:sp>
+      <p:sp>
+        <p:nvSpPr>
+          <p:cNvPr id="9" name="Shape 6"/>
+          <p:cNvSpPr/>
+          <p:nvPr/>
+        </p:nvSpPr>
+        <p:spPr>
+          <a:xfrm>
+            <a:off x="914400" y="2514600"/>
+            <a:ext cx="777240" cy="777240"/>
           </a:xfrm>
           <a:prstGeom prst="ellipse">
             <a:avLst/>
           </a:prstGeom>
           <a:solidFill>
-            <a:srgbClr val="324A9B"/>
+            <a:srgbClr val="CADCFC"/>
           </a:solidFill>
           <a:ln/>
         </p:spPr>
       </p:sp>
       <p:pic>
         <p:nvPicPr>
-          <p:cNvPr id="11" name="Image 1" descr="icon_sliders_white.png">    </p:cNvPr>
+          <p:cNvPr id="10" name="Image 1" descr="icon_barchart_navy.png">    </p:cNvPr>
           <p:cNvPicPr>
             <a:picLocks noChangeAspect="1"/>
           </p:cNvPicPr>
@@ -8056,8 +8996,8 @@
         </p:blipFill>
         <p:spPr>
           <a:xfrm>
-            <a:off x="4948733" y="2251253"/>
-            <a:ext cx="307238" cy="307238"/>
+            <a:off x="1116482" y="2716682"/>
+            <a:ext cx="373075" cy="373075"/>
           </a:xfrm>
           <a:prstGeom prst="rect">
             <a:avLst/>
@@ -8066,40 +9006,79 @@
       </p:pic>
       <p:sp>
         <p:nvSpPr>
-          <p:cNvPr id="12" name="Text 8"/>
-          <p:cNvSpPr/>
-          <p:nvPr/>
-        </p:nvSpPr>
-        <p:spPr>
-          <a:xfrm>
-            <a:off x="4754880" y="2880360"/>
-            <a:ext cx="2926080" cy="960120"/>
-          </a:xfrm>
-          <a:prstGeom prst="rect">
-            <a:avLst/>
-          </a:prstGeom>
-          <a:noFill/>
-          <a:ln/>
-        </p:spPr>
-        <p:txBody>
-          <a:bodyPr wrap="square" rtlCol="0" anchor="ctr"/>
-          <a:lstStyle/>
-          <a:p>
-            <a:pPr indent="0" marL="0">
-              <a:buNone/>
-            </a:pPr>
-            <a:r>
-              <a:rPr lang="en-US" sz="1300" b="1" dirty="0">
-                <a:solidFill>
-                  <a:srgbClr val="FFFFFF"/>
+          <p:cNvPr id="11" name="Text 7"/>
+          <p:cNvSpPr/>
+          <p:nvPr/>
+        </p:nvSpPr>
+        <p:spPr>
+          <a:xfrm>
+            <a:off x="1783080" y="2514600"/>
+            <a:ext cx="4069080" cy="384048"/>
+          </a:xfrm>
+          <a:prstGeom prst="rect">
+            <a:avLst/>
+          </a:prstGeom>
+          <a:noFill/>
+          <a:ln/>
+        </p:spPr>
+        <p:txBody>
+          <a:bodyPr wrap="square" rtlCol="0" anchor="ctr"/>
+          <a:lstStyle/>
+          <a:p>
+            <a:pPr indent="0" marL="0">
+              <a:buNone/>
+            </a:pPr>
+            <a:r>
+              <a:rPr lang="en-US" sz="1500" b="1" dirty="0">
+                <a:solidFill>
+                  <a:srgbClr val="1E2761"/>
                 </a:solidFill>
                 <a:latin typeface="Calibri" pitchFamily="34" charset="0"/>
                 <a:ea typeface="Calibri" pitchFamily="34" charset="-122"/>
                 <a:cs typeface="Calibri" pitchFamily="34" charset="-120"/>
               </a:rPr>
-              <a:t>Parámetros Técnicos</a:t>
-            </a:r>
-            <a:endParaRPr lang="en-US" sz="1300" dirty="0"/>
+              <a:t>Regresión Ridge</a:t>
+            </a:r>
+            <a:endParaRPr lang="en-US" sz="1500" dirty="0"/>
+          </a:p>
+        </p:txBody>
+      </p:sp>
+      <p:sp>
+        <p:nvSpPr>
+          <p:cNvPr id="12" name="Text 8"/>
+          <p:cNvSpPr/>
+          <p:nvPr/>
+        </p:nvSpPr>
+        <p:spPr>
+          <a:xfrm>
+            <a:off x="1783080" y="2944368"/>
+            <a:ext cx="4069080" cy="548640"/>
+          </a:xfrm>
+          <a:prstGeom prst="rect">
+            <a:avLst/>
+          </a:prstGeom>
+          <a:noFill/>
+          <a:ln/>
+        </p:spPr>
+        <p:txBody>
+          <a:bodyPr wrap="square" rtlCol="0" anchor="ctr"/>
+          <a:lstStyle/>
+          <a:p>
+            <a:pPr indent="0" marL="0">
+              <a:buNone/>
+            </a:pPr>
+            <a:r>
+              <a:rPr lang="en-US" sz="1100" dirty="0">
+                <a:solidFill>
+                  <a:srgbClr val="4A4A4A"/>
+                </a:solidFill>
+                <a:latin typeface="Calibri" pitchFamily="34" charset="0"/>
+                <a:ea typeface="Calibri" pitchFamily="34" charset="-122"/>
+                <a:cs typeface="Calibri" pitchFamily="34" charset="-120"/>
+              </a:rPr>
+              <a:t>Modelo estadístico entrenado para puntuar valores</a:t>
+            </a:r>
+            <a:endParaRPr lang="en-US" sz="1100" dirty="0"/>
           </a:p>
         </p:txBody>
       </p:sp>
@@ -8111,18 +9090,23 @@
         </p:nvSpPr>
         <p:spPr>
           <a:xfrm>
-            <a:off x="8229600" y="1828800"/>
-            <a:ext cx="3383280" cy="2148840"/>
+            <a:off x="6263640" y="2194560"/>
+            <a:ext cx="5257800" cy="1417320"/>
           </a:xfrm>
           <a:prstGeom prst="roundRect">
             <a:avLst>
-              <a:gd name="adj" fmla="val 4255"/>
+              <a:gd name="adj" fmla="val 6452"/>
             </a:avLst>
           </a:prstGeom>
           <a:solidFill>
-            <a:srgbClr val="263876"/>
-          </a:solidFill>
-          <a:ln/>
+            <a:srgbClr val="F7F9FC"/>
+          </a:solidFill>
+          <a:ln w="12700">
+            <a:solidFill>
+              <a:srgbClr val="E0E6F0"/>
+            </a:solidFill>
+            <a:prstDash val="solid"/>
+          </a:ln>
         </p:spPr>
       </p:sp>
       <p:sp>
@@ -8133,21 +9117,21 @@
         </p:nvSpPr>
         <p:spPr>
           <a:xfrm>
-            <a:off x="8485632" y="2084832"/>
-            <a:ext cx="640080" cy="640080"/>
+            <a:off x="6537960" y="2514600"/>
+            <a:ext cx="777240" cy="777240"/>
           </a:xfrm>
           <a:prstGeom prst="ellipse">
             <a:avLst/>
           </a:prstGeom>
           <a:solidFill>
-            <a:srgbClr val="324A9B"/>
+            <a:srgbClr val="CADCFC"/>
           </a:solidFill>
           <a:ln/>
         </p:spPr>
       </p:sp>
       <p:pic>
         <p:nvPicPr>
-          <p:cNvPr id="15" name="Image 2" descr="icon_target_white.png">    </p:cNvPr>
+          <p:cNvPr id="15" name="Image 2" descr="icon_cpu_navy.png">    </p:cNvPr>
           <p:cNvPicPr>
             <a:picLocks noChangeAspect="1"/>
           </p:cNvPicPr>
@@ -8161,8 +9145,8 @@
         </p:blipFill>
         <p:spPr>
           <a:xfrm>
-            <a:off x="8652053" y="2251253"/>
-            <a:ext cx="307238" cy="307238"/>
+            <a:off x="6740042" y="2716682"/>
+            <a:ext cx="373075" cy="373075"/>
           </a:xfrm>
           <a:prstGeom prst="rect">
             <a:avLst/>
@@ -8177,347 +9161,210 @@
         </p:nvSpPr>
         <p:spPr>
           <a:xfrm>
-            <a:off x="8458200" y="2880360"/>
-            <a:ext cx="2926080" cy="960120"/>
-          </a:xfrm>
-          <a:prstGeom prst="rect">
-            <a:avLst/>
-          </a:prstGeom>
-          <a:noFill/>
-          <a:ln/>
-        </p:spPr>
-        <p:txBody>
-          <a:bodyPr wrap="square" rtlCol="0" anchor="ctr"/>
-          <a:lstStyle/>
-          <a:p>
-            <a:pPr indent="0" marL="0">
-              <a:buNone/>
-            </a:pPr>
-            <a:r>
-              <a:rPr lang="en-US" sz="1300" b="1" dirty="0">
-                <a:solidFill>
-                  <a:srgbClr val="FFFFFF"/>
+            <a:off x="7406640" y="2514600"/>
+            <a:ext cx="4069080" cy="384048"/>
+          </a:xfrm>
+          <a:prstGeom prst="rect">
+            <a:avLst/>
+          </a:prstGeom>
+          <a:noFill/>
+          <a:ln/>
+        </p:spPr>
+        <p:txBody>
+          <a:bodyPr wrap="square" rtlCol="0" anchor="ctr"/>
+          <a:lstStyle/>
+          <a:p>
+            <a:pPr indent="0" marL="0">
+              <a:buNone/>
+            </a:pPr>
+            <a:r>
+              <a:rPr lang="en-US" sz="1500" b="1" dirty="0">
+                <a:solidFill>
+                  <a:srgbClr val="1E2761"/>
                 </a:solidFill>
                 <a:latin typeface="Calibri" pitchFamily="34" charset="0"/>
                 <a:ea typeface="Calibri" pitchFamily="34" charset="-122"/>
                 <a:cs typeface="Calibri" pitchFamily="34" charset="-120"/>
               </a:rPr>
-              <a:t>Selección por Parámetros Técnicos</a:t>
-            </a:r>
-            <a:endParaRPr lang="en-US" sz="1300" dirty="0"/>
-          </a:p>
-        </p:txBody>
-      </p:sp>
-      <p:sp>
-        <p:nvSpPr>
-          <p:cNvPr id="17" name="Shape 12"/>
-          <p:cNvSpPr/>
-          <p:nvPr/>
-        </p:nvSpPr>
-        <p:spPr>
-          <a:xfrm>
-            <a:off x="822960" y="4251960"/>
-            <a:ext cx="3383280" cy="2148840"/>
-          </a:xfrm>
-          <a:prstGeom prst="roundRect">
-            <a:avLst>
-              <a:gd name="adj" fmla="val 4255"/>
-            </a:avLst>
-          </a:prstGeom>
-          <a:solidFill>
-            <a:srgbClr val="263876"/>
-          </a:solidFill>
-          <a:ln/>
-        </p:spPr>
-      </p:sp>
-      <p:sp>
-        <p:nvSpPr>
-          <p:cNvPr id="18" name="Shape 13"/>
-          <p:cNvSpPr/>
-          <p:nvPr/>
-        </p:nvSpPr>
-        <p:spPr>
-          <a:xfrm>
-            <a:off x="1078992" y="4507992"/>
-            <a:ext cx="640080" cy="640080"/>
-          </a:xfrm>
-          <a:prstGeom prst="ellipse">
-            <a:avLst/>
-          </a:prstGeom>
-          <a:solidFill>
-            <a:srgbClr val="324A9B"/>
-          </a:solidFill>
-          <a:ln/>
-        </p:spPr>
-      </p:sp>
-      <p:pic>
-        <p:nvPicPr>
-          <p:cNvPr id="19" name="Image 3" descr="icon_shuffle_white.png">    </p:cNvPr>
-          <p:cNvPicPr>
-            <a:picLocks noChangeAspect="1"/>
-          </p:cNvPicPr>
-          <p:nvPr/>
-        </p:nvPicPr>
-        <p:blipFill>
-          <a:blip r:embed="rId4"/>
-          <a:stretch>
-            <a:fillRect/>
-          </a:stretch>
-        </p:blipFill>
-        <p:spPr>
-          <a:xfrm>
-            <a:off x="1245413" y="4674413"/>
-            <a:ext cx="307238" cy="307238"/>
-          </a:xfrm>
-          <a:prstGeom prst="rect">
-            <a:avLst/>
-          </a:prstGeom>
-        </p:spPr>
-      </p:pic>
-      <p:sp>
-        <p:nvSpPr>
-          <p:cNvPr id="20" name="Text 14"/>
-          <p:cNvSpPr/>
-          <p:nvPr/>
-        </p:nvSpPr>
-        <p:spPr>
-          <a:xfrm>
-            <a:off x="1051560" y="5303520"/>
-            <a:ext cx="2926080" cy="960120"/>
-          </a:xfrm>
-          <a:prstGeom prst="rect">
-            <a:avLst/>
-          </a:prstGeom>
-          <a:noFill/>
-          <a:ln/>
-        </p:spPr>
-        <p:txBody>
-          <a:bodyPr wrap="square" rtlCol="0" anchor="ctr"/>
-          <a:lstStyle/>
-          <a:p>
-            <a:pPr indent="0" marL="0">
-              <a:buNone/>
-            </a:pPr>
-            <a:r>
-              <a:rPr lang="en-US" sz="1300" b="1" dirty="0">
-                <a:solidFill>
-                  <a:srgbClr val="FFFFFF"/>
+              <a:t>Red Neuronal Pequeña</a:t>
+            </a:r>
+            <a:endParaRPr lang="en-US" sz="1500" dirty="0"/>
+          </a:p>
+        </p:txBody>
+      </p:sp>
+      <p:sp>
+        <p:nvSpPr>
+          <p:cNvPr id="17" name="Text 12"/>
+          <p:cNvSpPr/>
+          <p:nvPr/>
+        </p:nvSpPr>
+        <p:spPr>
+          <a:xfrm>
+            <a:off x="7406640" y="2944368"/>
+            <a:ext cx="4069080" cy="548640"/>
+          </a:xfrm>
+          <a:prstGeom prst="rect">
+            <a:avLst/>
+          </a:prstGeom>
+          <a:noFill/>
+          <a:ln/>
+        </p:spPr>
+        <p:txBody>
+          <a:bodyPr wrap="square" rtlCol="0" anchor="ctr"/>
+          <a:lstStyle/>
+          <a:p>
+            <a:pPr indent="0" marL="0">
+              <a:buNone/>
+            </a:pPr>
+            <a:r>
+              <a:rPr lang="en-US" sz="1100" dirty="0">
+                <a:solidFill>
+                  <a:srgbClr val="4A4A4A"/>
                 </a:solidFill>
                 <a:latin typeface="Calibri" pitchFamily="34" charset="0"/>
                 <a:ea typeface="Calibri" pitchFamily="34" charset="-122"/>
                 <a:cs typeface="Calibri" pitchFamily="34" charset="-120"/>
               </a:rPr>
-              <a:t>Criterios Alternativos</a:t>
-            </a:r>
-            <a:endParaRPr lang="en-US" sz="1300" dirty="0"/>
-          </a:p>
-        </p:txBody>
-      </p:sp>
-      <p:sp>
-        <p:nvSpPr>
-          <p:cNvPr id="21" name="Shape 15"/>
-          <p:cNvSpPr/>
-          <p:nvPr/>
-        </p:nvSpPr>
-        <p:spPr>
-          <a:xfrm>
-            <a:off x="4526280" y="4251960"/>
-            <a:ext cx="3383280" cy="2148840"/>
+              <a:t>Modelo de red neuronal entrenado para la misma tarea</a:t>
+            </a:r>
+            <a:endParaRPr lang="en-US" sz="1100" dirty="0"/>
+          </a:p>
+        </p:txBody>
+      </p:sp>
+      <p:sp>
+        <p:nvSpPr>
+          <p:cNvPr id="18" name="Shape 13"/>
+          <p:cNvSpPr/>
+          <p:nvPr/>
+        </p:nvSpPr>
+        <p:spPr>
+          <a:xfrm>
+            <a:off x="640080" y="3886200"/>
+            <a:ext cx="10881360" cy="1417320"/>
           </a:xfrm>
           <a:prstGeom prst="roundRect">
             <a:avLst>
-              <a:gd name="adj" fmla="val 4255"/>
+              <a:gd name="adj" fmla="val 6452"/>
             </a:avLst>
           </a:prstGeom>
           <a:solidFill>
-            <a:srgbClr val="263876"/>
-          </a:solidFill>
-          <a:ln/>
-        </p:spPr>
-      </p:sp>
-      <p:sp>
-        <p:nvSpPr>
-          <p:cNvPr id="22" name="Shape 16"/>
-          <p:cNvSpPr/>
-          <p:nvPr/>
-        </p:nvSpPr>
-        <p:spPr>
-          <a:xfrm>
-            <a:off x="4782312" y="4507992"/>
-            <a:ext cx="640080" cy="640080"/>
-          </a:xfrm>
-          <a:prstGeom prst="ellipse">
-            <a:avLst/>
-          </a:prstGeom>
-          <a:solidFill>
-            <a:srgbClr val="324A9B"/>
-          </a:solidFill>
-          <a:ln/>
-        </p:spPr>
-      </p:sp>
-      <p:pic>
-        <p:nvPicPr>
-          <p:cNvPr id="23" name="Image 4" descr="icon_activity_white.png">    </p:cNvPr>
-          <p:cNvPicPr>
-            <a:picLocks noChangeAspect="1"/>
-          </p:cNvPicPr>
-          <p:nvPr/>
-        </p:nvPicPr>
-        <p:blipFill>
-          <a:blip r:embed="rId5"/>
-          <a:stretch>
-            <a:fillRect/>
-          </a:stretch>
-        </p:blipFill>
-        <p:spPr>
-          <a:xfrm>
-            <a:off x="4948733" y="4674413"/>
-            <a:ext cx="307238" cy="307238"/>
-          </a:xfrm>
-          <a:prstGeom prst="rect">
-            <a:avLst/>
-          </a:prstGeom>
-        </p:spPr>
-      </p:pic>
-      <p:sp>
-        <p:nvSpPr>
-          <p:cNvPr id="24" name="Text 17"/>
-          <p:cNvSpPr/>
-          <p:nvPr/>
-        </p:nvSpPr>
-        <p:spPr>
-          <a:xfrm>
-            <a:off x="4754880" y="5303520"/>
-            <a:ext cx="2926080" cy="960120"/>
-          </a:xfrm>
-          <a:prstGeom prst="rect">
-            <a:avLst/>
-          </a:prstGeom>
-          <a:noFill/>
-          <a:ln/>
-        </p:spPr>
-        <p:txBody>
-          <a:bodyPr wrap="square" rtlCol="0" anchor="ctr"/>
-          <a:lstStyle/>
-          <a:p>
-            <a:pPr indent="0" marL="0">
-              <a:buNone/>
-            </a:pPr>
-            <a:r>
-              <a:rPr lang="en-US" sz="1300" b="1" dirty="0">
-                <a:solidFill>
-                  <a:srgbClr val="FFFFFF"/>
+            <a:srgbClr val="1E2761"/>
+          </a:solidFill>
+          <a:ln/>
+        </p:spPr>
+      </p:sp>
+      <p:sp>
+        <p:nvSpPr>
+          <p:cNvPr id="19" name="Text 14"/>
+          <p:cNvSpPr/>
+          <p:nvPr/>
+        </p:nvSpPr>
+        <p:spPr>
+          <a:xfrm>
+            <a:off x="914400" y="4041648"/>
+            <a:ext cx="10332720" cy="320040"/>
+          </a:xfrm>
+          <a:prstGeom prst="rect">
+            <a:avLst/>
+          </a:prstGeom>
+          <a:noFill/>
+          <a:ln/>
+        </p:spPr>
+        <p:txBody>
+          <a:bodyPr wrap="square" rtlCol="0" anchor="ctr"/>
+          <a:lstStyle/>
+          <a:p>
+            <a:pPr indent="0" marL="0">
+              <a:buNone/>
+            </a:pPr>
+            <a:r>
+              <a:rPr lang="en-US" sz="1150" b="1" spc="100" kern="0" dirty="0">
+                <a:solidFill>
+                  <a:srgbClr val="C9A227"/>
                 </a:solidFill>
                 <a:latin typeface="Calibri" pitchFamily="34" charset="0"/>
                 <a:ea typeface="Calibri" pitchFamily="34" charset="-122"/>
                 <a:cs typeface="Calibri" pitchFamily="34" charset="-120"/>
               </a:rPr>
-              <a:t>Módulo de Análisis</a:t>
-            </a:r>
-            <a:endParaRPr lang="en-US" sz="1300" dirty="0"/>
-          </a:p>
-        </p:txBody>
-      </p:sp>
-      <p:sp>
-        <p:nvSpPr>
-          <p:cNvPr id="25" name="Shape 18"/>
-          <p:cNvSpPr/>
-          <p:nvPr/>
-        </p:nvSpPr>
-        <p:spPr>
-          <a:xfrm>
-            <a:off x="8229600" y="4251960"/>
-            <a:ext cx="3383280" cy="2148840"/>
-          </a:xfrm>
-          <a:prstGeom prst="roundRect">
-            <a:avLst>
-              <a:gd name="adj" fmla="val 4255"/>
-            </a:avLst>
-          </a:prstGeom>
-          <a:solidFill>
-            <a:srgbClr val="263876"/>
-          </a:solidFill>
-          <a:ln/>
-        </p:spPr>
-      </p:sp>
-      <p:sp>
-        <p:nvSpPr>
-          <p:cNvPr id="26" name="Shape 19"/>
-          <p:cNvSpPr/>
-          <p:nvPr/>
-        </p:nvSpPr>
-        <p:spPr>
-          <a:xfrm>
-            <a:off x="8485632" y="4507992"/>
-            <a:ext cx="640080" cy="640080"/>
-          </a:xfrm>
-          <a:prstGeom prst="ellipse">
-            <a:avLst/>
-          </a:prstGeom>
-          <a:solidFill>
-            <a:srgbClr val="324A9B"/>
-          </a:solidFill>
-          <a:ln/>
-        </p:spPr>
-      </p:sp>
-      <p:pic>
-        <p:nvPicPr>
-          <p:cNvPr id="27" name="Image 5" descr="icon_alert_white.png">    </p:cNvPr>
-          <p:cNvPicPr>
-            <a:picLocks noChangeAspect="1"/>
-          </p:cNvPicPr>
-          <p:nvPr/>
-        </p:nvPicPr>
-        <p:blipFill>
-          <a:blip r:embed="rId6"/>
-          <a:stretch>
-            <a:fillRect/>
-          </a:stretch>
-        </p:blipFill>
-        <p:spPr>
-          <a:xfrm>
-            <a:off x="8652053" y="4674413"/>
-            <a:ext cx="307238" cy="307238"/>
-          </a:xfrm>
-          <a:prstGeom prst="rect">
-            <a:avLst/>
-          </a:prstGeom>
-        </p:spPr>
-      </p:pic>
-      <p:sp>
-        <p:nvSpPr>
-          <p:cNvPr id="28" name="Text 20"/>
-          <p:cNvSpPr/>
-          <p:nvPr/>
-        </p:nvSpPr>
-        <p:spPr>
-          <a:xfrm>
-            <a:off x="8458200" y="5303520"/>
-            <a:ext cx="2926080" cy="960120"/>
-          </a:xfrm>
-          <a:prstGeom prst="rect">
-            <a:avLst/>
-          </a:prstGeom>
-          <a:noFill/>
-          <a:ln/>
-        </p:spPr>
-        <p:txBody>
-          <a:bodyPr wrap="square" rtlCol="0" anchor="ctr"/>
-          <a:lstStyle/>
-          <a:p>
-            <a:pPr indent="0" marL="0">
-              <a:buNone/>
-            </a:pPr>
-            <a:r>
-              <a:rPr lang="en-US" sz="1300" b="1" dirty="0">
-                <a:solidFill>
-                  <a:srgbClr val="FFFFFF"/>
+              <a:t>RESULTADO AGREGADO SOBRE VARIOS ÍNDICES</a:t>
+            </a:r>
+            <a:endParaRPr lang="en-US" sz="1150" dirty="0"/>
+          </a:p>
+        </p:txBody>
+      </p:sp>
+      <p:sp>
+        <p:nvSpPr>
+          <p:cNvPr id="20" name="Text 15"/>
+          <p:cNvSpPr/>
+          <p:nvPr/>
+        </p:nvSpPr>
+        <p:spPr>
+          <a:xfrm>
+            <a:off x="914400" y="4407408"/>
+            <a:ext cx="10332720" cy="777240"/>
+          </a:xfrm>
+          <a:prstGeom prst="rect">
+            <a:avLst/>
+          </a:prstGeom>
+          <a:noFill/>
+          <a:ln/>
+        </p:spPr>
+        <p:txBody>
+          <a:bodyPr wrap="square" rtlCol="0" anchor="ctr"/>
+          <a:lstStyle/>
+          <a:p>
+            <a:pPr indent="0" marL="0">
+              <a:buNone/>
+            </a:pPr>
+            <a:r>
+              <a:rPr lang="en-US" sz="1350" dirty="0">
+                <a:solidFill>
+                  <a:srgbClr val="CADCFC"/>
                 </a:solidFill>
                 <a:latin typeface="Calibri" pitchFamily="34" charset="0"/>
                 <a:ea typeface="Calibri" pitchFamily="34" charset="-122"/>
                 <a:cs typeface="Calibri" pitchFamily="34" charset="-120"/>
               </a:rPr>
-              <a:t>Anomalías de Flujo de Dinero Bajo</a:t>
+              <a:t>Ningún modelo mostró una ventaja fiable. Confirma, con un método de validación más exigente, el mismo resultado ya obtenido con el modelo multifactor.</a:t>
+            </a:r>
+            <a:endParaRPr lang="en-US" sz="1350" dirty="0"/>
+          </a:p>
+        </p:txBody>
+      </p:sp>
+      <p:sp>
+        <p:nvSpPr>
+          <p:cNvPr id="21" name="Text 16"/>
+          <p:cNvSpPr/>
+          <p:nvPr/>
+        </p:nvSpPr>
+        <p:spPr>
+          <a:xfrm>
+            <a:off x="640080" y="5532120"/>
+            <a:ext cx="10881360" cy="640080"/>
+          </a:xfrm>
+          <a:prstGeom prst="rect">
+            <a:avLst/>
+          </a:prstGeom>
+          <a:noFill/>
+          <a:ln/>
+        </p:spPr>
+        <p:txBody>
+          <a:bodyPr wrap="square" rtlCol="0" anchor="ctr"/>
+          <a:lstStyle/>
+          <a:p>
+            <a:pPr indent="0" marL="0">
+              <a:buNone/>
+            </a:pPr>
+            <a:r>
+              <a:rPr lang="en-US" sz="1300" b="1" i="1" dirty="0">
+                <a:solidFill>
+                  <a:srgbClr val="1E2761"/>
+                </a:solidFill>
+                <a:latin typeface="Calibri" pitchFamily="34" charset="0"/>
+                <a:ea typeface="Calibri" pitchFamily="34" charset="-122"/>
+                <a:cs typeface="Calibri" pitchFamily="34" charset="-120"/>
+              </a:rPr>
+              <a:t>Ninguno de los enfoques probados en este proyecto ha demostrado una ventaja predictiva fiable sobre no aplicar ningún criterio.</a:t>
             </a:r>
             <a:endParaRPr lang="en-US" sz="1300" dirty="0"/>
           </a:p>
